--- a/assets/figures-editable/c3-c4/c4-e22.pptx
+++ b/assets/figures-editable/c3-c4/c4-e22.pptx
@@ -3104,8 +3104,8 @@
         </p:nvSpPr>
         <p:spPr>
           <a:xfrm>
-            <a:off x="274320" y="137160"/>
-            <a:ext cx="11612880" cy="365760"/>
+            <a:off x="274320" y="118872"/>
+            <a:ext cx="11612880" cy="340105"/>
           </a:xfrm>
           <a:prstGeom prst="rect">
             <a:avLst/>
@@ -3114,7 +3114,7 @@
           <a:effectLst/>
         </p:spPr>
         <p:txBody>
-          <a:bodyPr wrap="square" lIns="27432" rIns="27432" tIns="18288" bIns="18288" anchor="ctr">
+          <a:bodyPr wrap="none" lIns="18288" rIns="18288" tIns="18288" bIns="18288" anchor="t">
             <a:spAutoFit/>
           </a:bodyPr>
           <a:lstStyle/>
@@ -3125,7 +3125,7 @@
               </a:spcAft>
             </a:pPr>
             <a:r>
-              <a:rPr sz="2100" b="0" i="0">
+              <a:rPr sz="1900" b="1" i="0">
                 <a:solidFill>
                   <a:srgbClr val="8EDBD4"/>
                 </a:solidFill>
@@ -3136,23 +3136,20 @@
           </a:p>
         </p:txBody>
       </p:sp>
-      <p:sp>
-        <p:nvSpPr>
-          <p:cNvPr id="3" name="C4-E22 rect 1" descr="sci-ppt:o001"/>
-          <p:cNvSpPr/>
+      <p:cxnSp>
+        <p:nvCxnSpPr>
+          <p:cNvPr id="3" name="C4-E22 line 1" descr="sci-ppt:o001"/>
+          <p:cNvCxnSpPr/>
           <p:nvPr/>
-        </p:nvSpPr>
-        <p:spPr>
-          <a:xfrm>
-            <a:off x="594360" y="1417320"/>
-            <a:ext cx="3200400" cy="1325880"/>
-          </a:xfrm>
-          <a:prstGeom prst="rect">
+        </p:nvCxnSpPr>
+        <p:spPr>
+          <a:xfrm>
+            <a:off x="914400" y="4937760"/>
+            <a:ext cx="5669280" cy="0"/>
+          </a:xfrm>
+          <a:prstGeom prst="line">
             <a:avLst/>
           </a:prstGeom>
-          <a:solidFill>
-            <a:srgbClr val="213E4B"/>
-          </a:solidFill>
           <a:ln w="19050">
             <a:solidFill>
               <a:srgbClr val="B4C7D2"/>
@@ -3160,95 +3157,21 @@
           </a:ln>
           <a:effectLst/>
         </p:spPr>
-        <p:txBody>
-          <a:bodyPr rtlCol="0" anchor="ctr"/>
-          <a:lstStyle/>
-          <a:p>
-            <a:pPr algn="ctr"/>
-          </a:p>
-        </p:txBody>
-      </p:sp>
-      <p:sp>
-        <p:nvSpPr>
-          <p:cNvPr id="4" name="C4-E22 text 2" descr="sci-ppt:o002"/>
-          <p:cNvSpPr txBox="1"/>
-          <p:nvPr/>
-        </p:nvSpPr>
-        <p:spPr>
-          <a:xfrm>
-            <a:off x="758952" y="1627632"/>
-            <a:ext cx="2871216" cy="914400"/>
-          </a:xfrm>
-          <a:prstGeom prst="rect">
-            <a:avLst/>
-          </a:prstGeom>
-          <a:noFill/>
-          <a:effectLst/>
-        </p:spPr>
-        <p:txBody>
-          <a:bodyPr wrap="square" lIns="27432" rIns="27432" tIns="18288" bIns="18288" anchor="ctr">
-            <a:spAutoFit/>
-          </a:bodyPr>
-          <a:lstStyle/>
-          <a:p>
-            <a:pPr algn="l">
-              <a:spcAft>
-                <a:spcPts val="0"/>
-              </a:spcAft>
-            </a:pPr>
-            <a:r>
-              <a:rPr sz="1800" b="0" i="0">
-                <a:solidFill>
-                  <a:srgbClr val="E7F0F3"/>
-                </a:solidFill>
-                <a:latin typeface="Arial"/>
-              </a:rPr>
-              <a:t>Fixed pressure: G ∝ b⁴</a:t>
-            </a:r>
-          </a:p>
-        </p:txBody>
-      </p:sp>
+      </p:cxnSp>
       <p:cxnSp>
         <p:nvCxnSpPr>
-          <p:cNvPr id="5" name="C4-E22 arrow 3" descr="sci-ppt:o003"/>
+          <p:cNvPr id="4" name="C4-E22 line 2" descr="sci-ppt:o002"/>
           <p:cNvCxnSpPr/>
           <p:nvPr/>
         </p:nvCxnSpPr>
         <p:spPr>
           <a:xfrm>
-            <a:off x="3794760" y="2057400"/>
-            <a:ext cx="640080" cy="0"/>
+            <a:off x="914400" y="1371600"/>
+            <a:ext cx="0" cy="3566160"/>
           </a:xfrm>
           <a:prstGeom prst="line">
             <a:avLst/>
           </a:prstGeom>
-          <a:ln w="25400">
-            <a:solidFill>
-              <a:srgbClr val="8EDBD4"/>
-            </a:solidFill>
-            <a:headEnd type="none" w="med" len="med"/>
-            <a:tailEnd type="triangle" w="med" len="med"/>
-          </a:ln>
-          <a:effectLst/>
-        </p:spPr>
-      </p:cxnSp>
-      <p:sp>
-        <p:nvSpPr>
-          <p:cNvPr id="6" name="C4-E22 rect 4" descr="sci-ppt:o004"/>
-          <p:cNvSpPr/>
-          <p:nvPr/>
-        </p:nvSpPr>
-        <p:spPr>
-          <a:xfrm>
-            <a:off x="4480560" y="1417320"/>
-            <a:ext cx="3200400" cy="1325880"/>
-          </a:xfrm>
-          <a:prstGeom prst="rect">
-            <a:avLst/>
-          </a:prstGeom>
-          <a:solidFill>
-            <a:srgbClr val="213E4B"/>
-          </a:solidFill>
           <a:ln w="19050">
             <a:solidFill>
               <a:srgbClr val="B4C7D2"/>
@@ -3256,14 +3179,51 @@
           </a:ln>
           <a:effectLst/>
         </p:spPr>
-        <p:txBody>
-          <a:bodyPr rtlCol="0" anchor="ctr"/>
-          <a:lstStyle/>
-          <a:p>
-            <a:pPr algn="ctr"/>
-          </a:p>
-        </p:txBody>
-      </p:sp>
+      </p:cxnSp>
+      <p:cxnSp>
+        <p:nvCxnSpPr>
+          <p:cNvPr id="5" name="C4-E22 line 3" descr="sci-ppt:o003"/>
+          <p:cNvCxnSpPr/>
+          <p:nvPr/>
+        </p:nvCxnSpPr>
+        <p:spPr>
+          <a:xfrm>
+            <a:off x="914400" y="4937760"/>
+            <a:ext cx="0" cy="64008"/>
+          </a:xfrm>
+          <a:prstGeom prst="line">
+            <a:avLst/>
+          </a:prstGeom>
+          <a:ln w="12700">
+            <a:solidFill>
+              <a:srgbClr val="B4C7D2"/>
+            </a:solidFill>
+          </a:ln>
+          <a:effectLst/>
+        </p:spPr>
+      </p:cxnSp>
+      <p:cxnSp>
+        <p:nvCxnSpPr>
+          <p:cNvPr id="6" name="C4-E22 line 4" descr="sci-ppt:o004"/>
+          <p:cNvCxnSpPr/>
+          <p:nvPr/>
+        </p:nvCxnSpPr>
+        <p:spPr>
+          <a:xfrm>
+            <a:off x="914400" y="1371600"/>
+            <a:ext cx="0" cy="3566160"/>
+          </a:xfrm>
+          <a:prstGeom prst="line">
+            <a:avLst/>
+          </a:prstGeom>
+          <a:ln w="7620">
+            <a:solidFill>
+              <a:srgbClr val="2E4756"/>
+            </a:solidFill>
+          </a:ln>
+          <a:effectLst/>
+        </p:spPr>
+      </p:cxnSp>
       <p:sp>
         <p:nvSpPr>
           <p:cNvPr id="7" name="C4-E22 text 5" descr="sci-ppt:o005"/>
@@ -3272,8 +3232,8 @@
         </p:nvSpPr>
         <p:spPr>
           <a:xfrm>
-            <a:off x="4645152" y="1627632"/>
-            <a:ext cx="2871216" cy="914400"/>
+            <a:off x="457200" y="5020056"/>
+            <a:ext cx="914400" cy="208407"/>
           </a:xfrm>
           <a:prstGeom prst="rect">
             <a:avLst/>
@@ -3282,84 +3242,72 @@
           <a:effectLst/>
         </p:spPr>
         <p:txBody>
-          <a:bodyPr wrap="square" lIns="27432" rIns="27432" tIns="18288" bIns="18288" anchor="ctr">
+          <a:bodyPr wrap="none" lIns="18288" rIns="18288" tIns="18288" bIns="18288" anchor="t">
             <a:spAutoFit/>
           </a:bodyPr>
           <a:lstStyle/>
           <a:p>
-            <a:pPr algn="l">
+            <a:pPr algn="ctr">
               <a:spcAft>
                 <a:spcPts val="0"/>
               </a:spcAft>
             </a:pPr>
             <a:r>
-              <a:rPr sz="1800" b="0" i="0">
+              <a:rPr sz="1050" b="0" i="0">
                 <a:solidFill>
-                  <a:srgbClr val="E7F0F3"/>
+                  <a:srgbClr val="B4C7D2"/>
                 </a:solidFill>
                 <a:latin typeface="Arial"/>
               </a:rPr>
-              <a:t>Fixed volume: G ∝ b⁻⁸</a:t>
+              <a:t>0.5</a:t>
             </a:r>
           </a:p>
         </p:txBody>
       </p:sp>
       <p:cxnSp>
         <p:nvCxnSpPr>
-          <p:cNvPr id="8" name="C4-E22 arrow 6" descr="sci-ppt:o006"/>
+          <p:cNvPr id="8" name="C4-E22 line 6" descr="sci-ppt:o006"/>
           <p:cNvCxnSpPr/>
           <p:nvPr/>
         </p:nvCxnSpPr>
         <p:spPr>
           <a:xfrm>
-            <a:off x="7680960" y="2057400"/>
-            <a:ext cx="640080" cy="0"/>
+            <a:off x="2804160" y="4937760"/>
+            <a:ext cx="0" cy="64008"/>
           </a:xfrm>
           <a:prstGeom prst="line">
             <a:avLst/>
           </a:prstGeom>
-          <a:ln w="25400">
-            <a:solidFill>
-              <a:srgbClr val="8EDBD4"/>
-            </a:solidFill>
-            <a:headEnd type="none" w="med" len="med"/>
-            <a:tailEnd type="triangle" w="med" len="med"/>
-          </a:ln>
-          <a:effectLst/>
-        </p:spPr>
-      </p:cxnSp>
-      <p:sp>
-        <p:nvSpPr>
-          <p:cNvPr id="9" name="C4-E22 rect 7" descr="sci-ppt:o007"/>
-          <p:cNvSpPr/>
-          <p:nvPr/>
-        </p:nvSpPr>
-        <p:spPr>
-          <a:xfrm>
-            <a:off x="8366760" y="1417320"/>
-            <a:ext cx="3200400" cy="1325880"/>
-          </a:xfrm>
-          <a:prstGeom prst="rect">
-            <a:avLst/>
-          </a:prstGeom>
-          <a:solidFill>
-            <a:srgbClr val="213E4B"/>
-          </a:solidFill>
-          <a:ln w="19050">
+          <a:ln w="12700">
             <a:solidFill>
               <a:srgbClr val="B4C7D2"/>
             </a:solidFill>
           </a:ln>
           <a:effectLst/>
         </p:spPr>
-        <p:txBody>
-          <a:bodyPr rtlCol="0" anchor="ctr"/>
-          <a:lstStyle/>
-          <a:p>
-            <a:pPr algn="ctr"/>
-          </a:p>
-        </p:txBody>
-      </p:sp>
+      </p:cxnSp>
+      <p:cxnSp>
+        <p:nvCxnSpPr>
+          <p:cNvPr id="9" name="C4-E22 line 7" descr="sci-ppt:o007"/>
+          <p:cNvCxnSpPr/>
+          <p:nvPr/>
+        </p:nvCxnSpPr>
+        <p:spPr>
+          <a:xfrm>
+            <a:off x="2804160" y="1371600"/>
+            <a:ext cx="0" cy="3566160"/>
+          </a:xfrm>
+          <a:prstGeom prst="line">
+            <a:avLst/>
+          </a:prstGeom>
+          <a:ln w="7620">
+            <a:solidFill>
+              <a:srgbClr val="2E4756"/>
+            </a:solidFill>
+          </a:ln>
+          <a:effectLst/>
+        </p:spPr>
+      </p:cxnSp>
       <p:sp>
         <p:nvSpPr>
           <p:cNvPr id="10" name="C4-E22 text 8" descr="sci-ppt:o008"/>
@@ -3368,8 +3316,8 @@
         </p:nvSpPr>
         <p:spPr>
           <a:xfrm>
-            <a:off x="8531352" y="1627632"/>
-            <a:ext cx="2871216" cy="914400"/>
+            <a:off x="2346960" y="5020056"/>
+            <a:ext cx="914400" cy="208407"/>
           </a:xfrm>
           <a:prstGeom prst="rect">
             <a:avLst/>
@@ -3378,68 +3326,50 @@
           <a:effectLst/>
         </p:spPr>
         <p:txBody>
-          <a:bodyPr wrap="square" lIns="27432" rIns="27432" tIns="18288" bIns="18288" anchor="ctr">
+          <a:bodyPr wrap="none" lIns="18288" rIns="18288" tIns="18288" bIns="18288" anchor="t">
             <a:spAutoFit/>
           </a:bodyPr>
           <a:lstStyle/>
           <a:p>
-            <a:pPr algn="l">
+            <a:pPr algn="ctr">
               <a:spcAft>
                 <a:spcPts val="0"/>
               </a:spcAft>
             </a:pPr>
             <a:r>
-              <a:rPr sz="1800" b="0" i="0">
+              <a:rPr sz="1050" b="0" i="0">
                 <a:solidFill>
-                  <a:srgbClr val="E7F0F3"/>
+                  <a:srgbClr val="B4C7D2"/>
                 </a:solidFill>
                 <a:latin typeface="Arial"/>
               </a:rPr>
-              <a:t>Different crack evolution</a:t>
-            </a:r>
-          </a:p>
-        </p:txBody>
-      </p:sp>
-      <p:sp>
-        <p:nvSpPr>
-          <p:cNvPr id="11" name="C4-E22 text 9" descr="sci-ppt:o009"/>
-          <p:cNvSpPr txBox="1"/>
+              <a:t>1</a:t>
+            </a:r>
+          </a:p>
+        </p:txBody>
+      </p:sp>
+      <p:cxnSp>
+        <p:nvCxnSpPr>
+          <p:cNvPr id="11" name="C4-E22 line 9" descr="sci-ppt:o009"/>
+          <p:cNvCxnSpPr/>
           <p:nvPr/>
-        </p:nvSpPr>
-        <p:spPr>
-          <a:xfrm>
-            <a:off x="731520" y="3246120"/>
-            <a:ext cx="10789920" cy="457200"/>
-          </a:xfrm>
-          <a:prstGeom prst="rect">
+        </p:nvCxnSpPr>
+        <p:spPr>
+          <a:xfrm>
+            <a:off x="4693920" y="4937760"/>
+            <a:ext cx="0" cy="64008"/>
+          </a:xfrm>
+          <a:prstGeom prst="line">
             <a:avLst/>
           </a:prstGeom>
-          <a:noFill/>
+          <a:ln w="12700">
+            <a:solidFill>
+              <a:srgbClr val="B4C7D2"/>
+            </a:solidFill>
+          </a:ln>
           <a:effectLst/>
         </p:spPr>
-        <p:txBody>
-          <a:bodyPr wrap="square" lIns="27432" rIns="27432" tIns="18288" bIns="18288" anchor="ctr">
-            <a:spAutoFit/>
-          </a:bodyPr>
-          <a:lstStyle/>
-          <a:p>
-            <a:pPr algn="l">
-              <a:spcAft>
-                <a:spcPts val="0"/>
-              </a:spcAft>
-            </a:pPr>
-            <a:r>
-              <a:rPr sz="1800" b="0" i="0">
-                <a:solidFill>
-                  <a:srgbClr val="8EDBD4"/>
-                </a:solidFill>
-                <a:latin typeface="Arial"/>
-              </a:rPr>
-              <a:t>Work, storage, fracture consumption and net impulse retain separate meanings.</a:t>
-            </a:r>
-          </a:p>
-        </p:txBody>
-      </p:sp>
+      </p:cxnSp>
       <p:cxnSp>
         <p:nvCxnSpPr>
           <p:cNvPr id="12" name="C4-E22 line 10" descr="sci-ppt:o010"/>
@@ -3448,30 +3378,114 @@
         </p:nvCxnSpPr>
         <p:spPr>
           <a:xfrm>
-            <a:off x="274320" y="3977639"/>
-            <a:ext cx="11612880" cy="0"/>
+            <a:off x="4693920" y="1371600"/>
+            <a:ext cx="0" cy="3566160"/>
+          </a:xfrm>
+          <a:prstGeom prst="line">
+            <a:avLst/>
+          </a:prstGeom>
+          <a:ln w="7620">
+            <a:solidFill>
+              <a:srgbClr val="2E4756"/>
+            </a:solidFill>
+          </a:ln>
+          <a:effectLst/>
+        </p:spPr>
+      </p:cxnSp>
+      <p:sp>
+        <p:nvSpPr>
+          <p:cNvPr id="13" name="C4-E22 text 11" descr="sci-ppt:o011"/>
+          <p:cNvSpPr txBox="1"/>
+          <p:nvPr/>
+        </p:nvSpPr>
+        <p:spPr>
+          <a:xfrm>
+            <a:off x="4236720" y="5020056"/>
+            <a:ext cx="914400" cy="208407"/>
+          </a:xfrm>
+          <a:prstGeom prst="rect">
+            <a:avLst/>
+          </a:prstGeom>
+          <a:noFill/>
+          <a:effectLst/>
+        </p:spPr>
+        <p:txBody>
+          <a:bodyPr wrap="none" lIns="18288" rIns="18288" tIns="18288" bIns="18288" anchor="t">
+            <a:spAutoFit/>
+          </a:bodyPr>
+          <a:lstStyle/>
+          <a:p>
+            <a:pPr algn="ctr">
+              <a:spcAft>
+                <a:spcPts val="0"/>
+              </a:spcAft>
+            </a:pPr>
+            <a:r>
+              <a:rPr sz="1050" b="0" i="0">
+                <a:solidFill>
+                  <a:srgbClr val="B4C7D2"/>
+                </a:solidFill>
+                <a:latin typeface="Arial"/>
+              </a:rPr>
+              <a:t>1.5</a:t>
+            </a:r>
+          </a:p>
+        </p:txBody>
+      </p:sp>
+      <p:cxnSp>
+        <p:nvCxnSpPr>
+          <p:cNvPr id="14" name="C4-E22 line 12" descr="sci-ppt:o012"/>
+          <p:cNvCxnSpPr/>
+          <p:nvPr/>
+        </p:nvCxnSpPr>
+        <p:spPr>
+          <a:xfrm>
+            <a:off x="6583680" y="4937760"/>
+            <a:ext cx="0" cy="64008"/>
           </a:xfrm>
           <a:prstGeom prst="line">
             <a:avLst/>
           </a:prstGeom>
           <a:ln w="12700">
             <a:solidFill>
-              <a:srgbClr val="405967"/>
+              <a:srgbClr val="B4C7D2"/>
             </a:solidFill>
           </a:ln>
           <a:effectLst/>
         </p:spPr>
       </p:cxnSp>
-      <p:sp>
-        <p:nvSpPr>
-          <p:cNvPr id="13" name="C4-E22 text 11" descr="sci-ppt:o011"/>
+      <p:cxnSp>
+        <p:nvCxnSpPr>
+          <p:cNvPr id="15" name="C4-E22 line 13" descr="sci-ppt:o013"/>
+          <p:cNvCxnSpPr/>
+          <p:nvPr/>
+        </p:nvCxnSpPr>
+        <p:spPr>
+          <a:xfrm>
+            <a:off x="6583680" y="1371600"/>
+            <a:ext cx="0" cy="3566160"/>
+          </a:xfrm>
+          <a:prstGeom prst="line">
+            <a:avLst/>
+          </a:prstGeom>
+          <a:ln w="7620">
+            <a:solidFill>
+              <a:srgbClr val="2E4756"/>
+            </a:solidFill>
+          </a:ln>
+          <a:effectLst/>
+        </p:spPr>
+      </p:cxnSp>
+      <p:sp>
+        <p:nvSpPr>
+          <p:cNvPr id="16" name="C4-E22 text 14" descr="sci-ppt:o014"/>
           <p:cNvSpPr txBox="1"/>
           <p:nvPr/>
         </p:nvSpPr>
         <p:spPr>
           <a:xfrm>
-            <a:off x="320040" y="4096512"/>
-            <a:ext cx="5715000" cy="246888"/>
+            <a:off x="6126480" y="5020056"/>
+            <a:ext cx="914400" cy="208407"/>
           </a:xfrm>
           <a:prstGeom prst="rect">
             <a:avLst/>
@@ -3480,7 +3494,445 @@
           <a:effectLst/>
         </p:spPr>
         <p:txBody>
-          <a:bodyPr wrap="square" lIns="27432" rIns="27432" tIns="18288" bIns="18288" anchor="ctr">
+          <a:bodyPr wrap="none" lIns="18288" rIns="18288" tIns="18288" bIns="18288" anchor="t">
+            <a:spAutoFit/>
+          </a:bodyPr>
+          <a:lstStyle/>
+          <a:p>
+            <a:pPr algn="ctr">
+              <a:spcAft>
+                <a:spcPts val="0"/>
+              </a:spcAft>
+            </a:pPr>
+            <a:r>
+              <a:rPr sz="1050" b="0" i="0">
+                <a:solidFill>
+                  <a:srgbClr val="B4C7D2"/>
+                </a:solidFill>
+                <a:latin typeface="Arial"/>
+              </a:rPr>
+              <a:t>2</a:t>
+            </a:r>
+          </a:p>
+        </p:txBody>
+      </p:sp>
+      <p:cxnSp>
+        <p:nvCxnSpPr>
+          <p:cNvPr id="17" name="C4-E22 line 15" descr="sci-ppt:o015"/>
+          <p:cNvCxnSpPr/>
+          <p:nvPr/>
+        </p:nvCxnSpPr>
+        <p:spPr>
+          <a:xfrm>
+            <a:off x="850392" y="4937760"/>
+            <a:ext cx="64008" cy="0"/>
+          </a:xfrm>
+          <a:prstGeom prst="line">
+            <a:avLst/>
+          </a:prstGeom>
+          <a:ln w="12700">
+            <a:solidFill>
+              <a:srgbClr val="B4C7D2"/>
+            </a:solidFill>
+          </a:ln>
+          <a:effectLst/>
+        </p:spPr>
+      </p:cxnSp>
+      <p:cxnSp>
+        <p:nvCxnSpPr>
+          <p:cNvPr id="18" name="C4-E22 line 16" descr="sci-ppt:o016"/>
+          <p:cNvCxnSpPr/>
+          <p:nvPr/>
+        </p:nvCxnSpPr>
+        <p:spPr>
+          <a:xfrm>
+            <a:off x="850392" y="4046220"/>
+            <a:ext cx="64008" cy="0"/>
+          </a:xfrm>
+          <a:prstGeom prst="line">
+            <a:avLst/>
+          </a:prstGeom>
+          <a:ln w="12700">
+            <a:solidFill>
+              <a:srgbClr val="B4C7D2"/>
+            </a:solidFill>
+          </a:ln>
+          <a:effectLst/>
+        </p:spPr>
+      </p:cxnSp>
+      <p:cxnSp>
+        <p:nvCxnSpPr>
+          <p:cNvPr id="19" name="C4-E22 line 17" descr="sci-ppt:o017"/>
+          <p:cNvCxnSpPr/>
+          <p:nvPr/>
+        </p:nvCxnSpPr>
+        <p:spPr>
+          <a:xfrm>
+            <a:off x="914400" y="4046220"/>
+            <a:ext cx="5669280" cy="0"/>
+          </a:xfrm>
+          <a:prstGeom prst="line">
+            <a:avLst/>
+          </a:prstGeom>
+          <a:ln w="7620">
+            <a:solidFill>
+              <a:srgbClr val="2E4756"/>
+            </a:solidFill>
+          </a:ln>
+          <a:effectLst/>
+        </p:spPr>
+      </p:cxnSp>
+      <p:sp>
+        <p:nvSpPr>
+          <p:cNvPr id="20" name="C4-E22 text 18" descr="sci-ppt:o018"/>
+          <p:cNvSpPr txBox="1"/>
+          <p:nvPr/>
+        </p:nvSpPr>
+        <p:spPr>
+          <a:xfrm>
+            <a:off x="45720" y="3963924"/>
+            <a:ext cx="777240" cy="208407"/>
+          </a:xfrm>
+          <a:prstGeom prst="rect">
+            <a:avLst/>
+          </a:prstGeom>
+          <a:noFill/>
+          <a:effectLst/>
+        </p:spPr>
+        <p:txBody>
+          <a:bodyPr wrap="none" lIns="18288" rIns="18288" tIns="18288" bIns="18288" anchor="t">
+            <a:spAutoFit/>
+          </a:bodyPr>
+          <a:lstStyle/>
+          <a:p>
+            <a:pPr algn="r">
+              <a:spcAft>
+                <a:spcPts val="0"/>
+              </a:spcAft>
+            </a:pPr>
+            <a:r>
+              <a:rPr sz="1050" b="0" i="0">
+                <a:solidFill>
+                  <a:srgbClr val="B4C7D2"/>
+                </a:solidFill>
+                <a:latin typeface="Arial"/>
+              </a:rPr>
+              <a:t>0.1</a:t>
+            </a:r>
+          </a:p>
+        </p:txBody>
+      </p:sp>
+      <p:cxnSp>
+        <p:nvCxnSpPr>
+          <p:cNvPr id="21" name="C4-E22 line 19" descr="sci-ppt:o019"/>
+          <p:cNvCxnSpPr/>
+          <p:nvPr/>
+        </p:nvCxnSpPr>
+        <p:spPr>
+          <a:xfrm>
+            <a:off x="850392" y="3154680"/>
+            <a:ext cx="64008" cy="0"/>
+          </a:xfrm>
+          <a:prstGeom prst="line">
+            <a:avLst/>
+          </a:prstGeom>
+          <a:ln w="12700">
+            <a:solidFill>
+              <a:srgbClr val="B4C7D2"/>
+            </a:solidFill>
+          </a:ln>
+          <a:effectLst/>
+        </p:spPr>
+      </p:cxnSp>
+      <p:cxnSp>
+        <p:nvCxnSpPr>
+          <p:cNvPr id="22" name="C4-E22 line 20" descr="sci-ppt:o020"/>
+          <p:cNvCxnSpPr/>
+          <p:nvPr/>
+        </p:nvCxnSpPr>
+        <p:spPr>
+          <a:xfrm>
+            <a:off x="914400" y="3154680"/>
+            <a:ext cx="5669280" cy="0"/>
+          </a:xfrm>
+          <a:prstGeom prst="line">
+            <a:avLst/>
+          </a:prstGeom>
+          <a:ln w="7620">
+            <a:solidFill>
+              <a:srgbClr val="2E4756"/>
+            </a:solidFill>
+          </a:ln>
+          <a:effectLst/>
+        </p:spPr>
+      </p:cxnSp>
+      <p:sp>
+        <p:nvSpPr>
+          <p:cNvPr id="23" name="C4-E22 text 21" descr="sci-ppt:o021"/>
+          <p:cNvSpPr txBox="1"/>
+          <p:nvPr/>
+        </p:nvSpPr>
+        <p:spPr>
+          <a:xfrm>
+            <a:off x="45720" y="3072384"/>
+            <a:ext cx="777240" cy="208407"/>
+          </a:xfrm>
+          <a:prstGeom prst="rect">
+            <a:avLst/>
+          </a:prstGeom>
+          <a:noFill/>
+          <a:effectLst/>
+        </p:spPr>
+        <p:txBody>
+          <a:bodyPr wrap="none" lIns="18288" rIns="18288" tIns="18288" bIns="18288" anchor="t">
+            <a:spAutoFit/>
+          </a:bodyPr>
+          <a:lstStyle/>
+          <a:p>
+            <a:pPr algn="r">
+              <a:spcAft>
+                <a:spcPts val="0"/>
+              </a:spcAft>
+            </a:pPr>
+            <a:r>
+              <a:rPr sz="1050" b="0" i="0">
+                <a:solidFill>
+                  <a:srgbClr val="B4C7D2"/>
+                </a:solidFill>
+                <a:latin typeface="Arial"/>
+              </a:rPr>
+              <a:t>1</a:t>
+            </a:r>
+          </a:p>
+        </p:txBody>
+      </p:sp>
+      <p:cxnSp>
+        <p:nvCxnSpPr>
+          <p:cNvPr id="24" name="C4-E22 line 22" descr="sci-ppt:o022"/>
+          <p:cNvCxnSpPr/>
+          <p:nvPr/>
+        </p:nvCxnSpPr>
+        <p:spPr>
+          <a:xfrm>
+            <a:off x="850392" y="2263140"/>
+            <a:ext cx="64008" cy="0"/>
+          </a:xfrm>
+          <a:prstGeom prst="line">
+            <a:avLst/>
+          </a:prstGeom>
+          <a:ln w="12700">
+            <a:solidFill>
+              <a:srgbClr val="B4C7D2"/>
+            </a:solidFill>
+          </a:ln>
+          <a:effectLst/>
+        </p:spPr>
+      </p:cxnSp>
+      <p:cxnSp>
+        <p:nvCxnSpPr>
+          <p:cNvPr id="25" name="C4-E22 line 23" descr="sci-ppt:o023"/>
+          <p:cNvCxnSpPr/>
+          <p:nvPr/>
+        </p:nvCxnSpPr>
+        <p:spPr>
+          <a:xfrm>
+            <a:off x="914400" y="2263140"/>
+            <a:ext cx="5669280" cy="0"/>
+          </a:xfrm>
+          <a:prstGeom prst="line">
+            <a:avLst/>
+          </a:prstGeom>
+          <a:ln w="7620">
+            <a:solidFill>
+              <a:srgbClr val="2E4756"/>
+            </a:solidFill>
+          </a:ln>
+          <a:effectLst/>
+        </p:spPr>
+      </p:cxnSp>
+      <p:sp>
+        <p:nvSpPr>
+          <p:cNvPr id="26" name="C4-E22 text 24" descr="sci-ppt:o024"/>
+          <p:cNvSpPr txBox="1"/>
+          <p:nvPr/>
+        </p:nvSpPr>
+        <p:spPr>
+          <a:xfrm>
+            <a:off x="45720" y="2180844"/>
+            <a:ext cx="777240" cy="208407"/>
+          </a:xfrm>
+          <a:prstGeom prst="rect">
+            <a:avLst/>
+          </a:prstGeom>
+          <a:noFill/>
+          <a:effectLst/>
+        </p:spPr>
+        <p:txBody>
+          <a:bodyPr wrap="none" lIns="18288" rIns="18288" tIns="18288" bIns="18288" anchor="t">
+            <a:spAutoFit/>
+          </a:bodyPr>
+          <a:lstStyle/>
+          <a:p>
+            <a:pPr algn="r">
+              <a:spcAft>
+                <a:spcPts val="0"/>
+              </a:spcAft>
+            </a:pPr>
+            <a:r>
+              <a:rPr sz="1050" b="0" i="0">
+                <a:solidFill>
+                  <a:srgbClr val="B4C7D2"/>
+                </a:solidFill>
+                <a:latin typeface="Arial"/>
+              </a:rPr>
+              <a:t>10</a:t>
+            </a:r>
+          </a:p>
+        </p:txBody>
+      </p:sp>
+      <p:cxnSp>
+        <p:nvCxnSpPr>
+          <p:cNvPr id="27" name="C4-E22 line 25" descr="sci-ppt:o025"/>
+          <p:cNvCxnSpPr/>
+          <p:nvPr/>
+        </p:nvCxnSpPr>
+        <p:spPr>
+          <a:xfrm>
+            <a:off x="850392" y="1371600"/>
+            <a:ext cx="64008" cy="0"/>
+          </a:xfrm>
+          <a:prstGeom prst="line">
+            <a:avLst/>
+          </a:prstGeom>
+          <a:ln w="12700">
+            <a:solidFill>
+              <a:srgbClr val="B4C7D2"/>
+            </a:solidFill>
+          </a:ln>
+          <a:effectLst/>
+        </p:spPr>
+      </p:cxnSp>
+      <p:cxnSp>
+        <p:nvCxnSpPr>
+          <p:cNvPr id="28" name="C4-E22 line 26" descr="sci-ppt:o026"/>
+          <p:cNvCxnSpPr/>
+          <p:nvPr/>
+        </p:nvCxnSpPr>
+        <p:spPr>
+          <a:xfrm>
+            <a:off x="914400" y="1371600"/>
+            <a:ext cx="5669280" cy="0"/>
+          </a:xfrm>
+          <a:prstGeom prst="line">
+            <a:avLst/>
+          </a:prstGeom>
+          <a:ln w="7620">
+            <a:solidFill>
+              <a:srgbClr val="2E4756"/>
+            </a:solidFill>
+          </a:ln>
+          <a:effectLst/>
+        </p:spPr>
+      </p:cxnSp>
+      <p:sp>
+        <p:nvSpPr>
+          <p:cNvPr id="29" name="C4-E22 text 27" descr="sci-ppt:o027"/>
+          <p:cNvSpPr txBox="1"/>
+          <p:nvPr/>
+        </p:nvSpPr>
+        <p:spPr>
+          <a:xfrm>
+            <a:off x="45720" y="1289304"/>
+            <a:ext cx="777240" cy="208407"/>
+          </a:xfrm>
+          <a:prstGeom prst="rect">
+            <a:avLst/>
+          </a:prstGeom>
+          <a:noFill/>
+          <a:effectLst/>
+        </p:spPr>
+        <p:txBody>
+          <a:bodyPr wrap="none" lIns="18288" rIns="18288" tIns="18288" bIns="18288" anchor="t">
+            <a:spAutoFit/>
+          </a:bodyPr>
+          <a:lstStyle/>
+          <a:p>
+            <a:pPr algn="r">
+              <a:spcAft>
+                <a:spcPts val="0"/>
+              </a:spcAft>
+            </a:pPr>
+            <a:r>
+              <a:rPr sz="1050" b="0" i="0">
+                <a:solidFill>
+                  <a:srgbClr val="B4C7D2"/>
+                </a:solidFill>
+                <a:latin typeface="Arial"/>
+              </a:rPr>
+              <a:t>100</a:t>
+            </a:r>
+          </a:p>
+        </p:txBody>
+      </p:sp>
+      <p:sp>
+        <p:nvSpPr>
+          <p:cNvPr id="30" name="C4-E22 text 28" descr="sci-ppt:o028"/>
+          <p:cNvSpPr txBox="1"/>
+          <p:nvPr/>
+        </p:nvSpPr>
+        <p:spPr>
+          <a:xfrm>
+            <a:off x="914400" y="5221224"/>
+            <a:ext cx="5669280" cy="231648"/>
+          </a:xfrm>
+          <a:prstGeom prst="rect">
+            <a:avLst/>
+          </a:prstGeom>
+          <a:noFill/>
+          <a:effectLst/>
+        </p:spPr>
+        <p:txBody>
+          <a:bodyPr wrap="none" lIns="18288" rIns="18288" tIns="18288" bIns="18288" anchor="t">
+            <a:spAutoFit/>
+          </a:bodyPr>
+          <a:lstStyle/>
+          <a:p>
+            <a:pPr algn="ctr">
+              <a:spcAft>
+                <a:spcPts val="0"/>
+              </a:spcAft>
+            </a:pPr>
+            <a:r>
+              <a:rPr sz="1200" b="0" i="0">
+                <a:solidFill>
+                  <a:srgbClr val="E7F0F3"/>
+                </a:solidFill>
+                <a:latin typeface="Arial"/>
+              </a:rPr>
+              <a:t>b / b₀</a:t>
+            </a:r>
+          </a:p>
+        </p:txBody>
+      </p:sp>
+      <p:sp>
+        <p:nvSpPr>
+          <p:cNvPr id="31" name="C4-E22 text 29" descr="sci-ppt:o029"/>
+          <p:cNvSpPr txBox="1"/>
+          <p:nvPr/>
+        </p:nvSpPr>
+        <p:spPr>
+          <a:xfrm>
+            <a:off x="365760" y="1024128"/>
+            <a:ext cx="5669280" cy="231648"/>
+          </a:xfrm>
+          <a:prstGeom prst="rect">
+            <a:avLst/>
+          </a:prstGeom>
+          <a:noFill/>
+          <a:effectLst/>
+        </p:spPr>
+        <p:txBody>
+          <a:bodyPr wrap="none" lIns="18288" rIns="18288" tIns="18288" bIns="18288" anchor="t">
             <a:spAutoFit/>
           </a:bodyPr>
           <a:lstStyle/>
@@ -3491,27 +3943,994 @@
               </a:spcAft>
             </a:pPr>
             <a:r>
+              <a:rPr sz="1200" b="0" i="0">
+                <a:solidFill>
+                  <a:srgbClr val="E7F0F3"/>
+                </a:solidFill>
+                <a:latin typeface="Arial"/>
+              </a:rPr>
+              <a:t>G / G(b₀)</a:t>
+            </a:r>
+          </a:p>
+        </p:txBody>
+      </p:sp>
+      <p:sp>
+        <p:nvSpPr>
+          <p:cNvPr id="32" name="C4-E22 polygon 30" descr="sci-ppt:o030"/>
+          <p:cNvSpPr/>
+          <p:nvPr/>
+        </p:nvSpPr>
+        <p:spPr>
+          <a:xfrm>
+            <a:off x="914400" y="2081158"/>
+            <a:ext cx="5669280" cy="2147043"/>
+          </a:xfrm>
+          <a:custGeom>
+            <a:avLst/>
+            <a:gdLst/>
+            <a:ahLst/>
+            <a:cxnLst/>
+            <a:rect l="l" t="t" r="r" b="b"/>
+            <a:pathLst>
+              <a:path w="5669280" h="2147043">
+                <a:moveTo>
+                  <a:pt x="0" y="2147043"/>
+                </a:moveTo>
+                <a:lnTo>
+                  <a:pt x="57265" y="2100807"/>
+                </a:lnTo>
+                <a:lnTo>
+                  <a:pt x="114530" y="2055913"/>
+                </a:lnTo>
+                <a:lnTo>
+                  <a:pt x="171796" y="2012283"/>
+                </a:lnTo>
+                <a:lnTo>
+                  <a:pt x="229061" y="1969848"/>
+                </a:lnTo>
+                <a:lnTo>
+                  <a:pt x="286327" y="1928545"/>
+                </a:lnTo>
+                <a:lnTo>
+                  <a:pt x="343592" y="1888315"/>
+                </a:lnTo>
+                <a:lnTo>
+                  <a:pt x="400858" y="1849104"/>
+                </a:lnTo>
+                <a:lnTo>
+                  <a:pt x="458123" y="1810861"/>
+                </a:lnTo>
+                <a:lnTo>
+                  <a:pt x="515389" y="1773540"/>
+                </a:lnTo>
+                <a:lnTo>
+                  <a:pt x="572654" y="1737096"/>
+                </a:lnTo>
+                <a:lnTo>
+                  <a:pt x="629920" y="1701491"/>
+                </a:lnTo>
+                <a:lnTo>
+                  <a:pt x="687185" y="1666686"/>
+                </a:lnTo>
+                <a:lnTo>
+                  <a:pt x="744450" y="1632646"/>
+                </a:lnTo>
+                <a:lnTo>
+                  <a:pt x="801716" y="1599338"/>
+                </a:lnTo>
+                <a:lnTo>
+                  <a:pt x="858981" y="1566731"/>
+                </a:lnTo>
+                <a:lnTo>
+                  <a:pt x="916247" y="1534797"/>
+                </a:lnTo>
+                <a:lnTo>
+                  <a:pt x="973512" y="1503507"/>
+                </a:lnTo>
+                <a:lnTo>
+                  <a:pt x="1030778" y="1472838"/>
+                </a:lnTo>
+                <a:lnTo>
+                  <a:pt x="1088043" y="1442764"/>
+                </a:lnTo>
+                <a:lnTo>
+                  <a:pt x="1145309" y="1413263"/>
+                </a:lnTo>
+                <a:lnTo>
+                  <a:pt x="1202574" y="1384313"/>
+                </a:lnTo>
+                <a:lnTo>
+                  <a:pt x="1259840" y="1355894"/>
+                </a:lnTo>
+                <a:lnTo>
+                  <a:pt x="1317105" y="1327988"/>
+                </a:lnTo>
+                <a:lnTo>
+                  <a:pt x="1374370" y="1300576"/>
+                </a:lnTo>
+                <a:lnTo>
+                  <a:pt x="1431636" y="1273640"/>
+                </a:lnTo>
+                <a:lnTo>
+                  <a:pt x="1488901" y="1247165"/>
+                </a:lnTo>
+                <a:lnTo>
+                  <a:pt x="1546167" y="1221134"/>
+                </a:lnTo>
+                <a:lnTo>
+                  <a:pt x="1603432" y="1195534"/>
+                </a:lnTo>
+                <a:lnTo>
+                  <a:pt x="1660698" y="1170351"/>
+                </a:lnTo>
+                <a:lnTo>
+                  <a:pt x="1717963" y="1145570"/>
+                </a:lnTo>
+                <a:lnTo>
+                  <a:pt x="1775229" y="1121180"/>
+                </a:lnTo>
+                <a:lnTo>
+                  <a:pt x="1832494" y="1097167"/>
+                </a:lnTo>
+                <a:lnTo>
+                  <a:pt x="1889760" y="1073522"/>
+                </a:lnTo>
+                <a:lnTo>
+                  <a:pt x="1947025" y="1050231"/>
+                </a:lnTo>
+                <a:lnTo>
+                  <a:pt x="2004290" y="1027286"/>
+                </a:lnTo>
+                <a:lnTo>
+                  <a:pt x="2061556" y="1004676"/>
+                </a:lnTo>
+                <a:lnTo>
+                  <a:pt x="2118821" y="982391"/>
+                </a:lnTo>
+                <a:lnTo>
+                  <a:pt x="2176087" y="960423"/>
+                </a:lnTo>
+                <a:lnTo>
+                  <a:pt x="2233352" y="938761"/>
+                </a:lnTo>
+                <a:lnTo>
+                  <a:pt x="2290618" y="917399"/>
+                </a:lnTo>
+                <a:lnTo>
+                  <a:pt x="2347883" y="896327"/>
+                </a:lnTo>
+                <a:lnTo>
+                  <a:pt x="2405149" y="875538"/>
+                </a:lnTo>
+                <a:lnTo>
+                  <a:pt x="2462414" y="855024"/>
+                </a:lnTo>
+                <a:lnTo>
+                  <a:pt x="2519680" y="834779"/>
+                </a:lnTo>
+                <a:lnTo>
+                  <a:pt x="2576945" y="814794"/>
+                </a:lnTo>
+                <a:lnTo>
+                  <a:pt x="2634210" y="795064"/>
+                </a:lnTo>
+                <a:lnTo>
+                  <a:pt x="2691476" y="775583"/>
+                </a:lnTo>
+                <a:lnTo>
+                  <a:pt x="2748741" y="756343"/>
+                </a:lnTo>
+                <a:lnTo>
+                  <a:pt x="2806007" y="737340"/>
+                </a:lnTo>
+                <a:lnTo>
+                  <a:pt x="2863272" y="718567"/>
+                </a:lnTo>
+                <a:lnTo>
+                  <a:pt x="2920538" y="700018"/>
+                </a:lnTo>
+                <a:lnTo>
+                  <a:pt x="2977803" y="681690"/>
+                </a:lnTo>
+                <a:lnTo>
+                  <a:pt x="3035069" y="663575"/>
+                </a:lnTo>
+                <a:lnTo>
+                  <a:pt x="3092334" y="645670"/>
+                </a:lnTo>
+                <a:lnTo>
+                  <a:pt x="3149600" y="627970"/>
+                </a:lnTo>
+                <a:lnTo>
+                  <a:pt x="3206865" y="610470"/>
+                </a:lnTo>
+                <a:lnTo>
+                  <a:pt x="3264130" y="593165"/>
+                </a:lnTo>
+                <a:lnTo>
+                  <a:pt x="3321396" y="576051"/>
+                </a:lnTo>
+                <a:lnTo>
+                  <a:pt x="3378661" y="559125"/>
+                </a:lnTo>
+                <a:lnTo>
+                  <a:pt x="3435927" y="542381"/>
+                </a:lnTo>
+                <a:lnTo>
+                  <a:pt x="3493192" y="525817"/>
+                </a:lnTo>
+                <a:lnTo>
+                  <a:pt x="3550458" y="509427"/>
+                </a:lnTo>
+                <a:lnTo>
+                  <a:pt x="3607723" y="493210"/>
+                </a:lnTo>
+                <a:lnTo>
+                  <a:pt x="3664989" y="477160"/>
+                </a:lnTo>
+                <a:lnTo>
+                  <a:pt x="3722254" y="461276"/>
+                </a:lnTo>
+                <a:lnTo>
+                  <a:pt x="3779520" y="445552"/>
+                </a:lnTo>
+                <a:lnTo>
+                  <a:pt x="3836785" y="429986"/>
+                </a:lnTo>
+                <a:lnTo>
+                  <a:pt x="3894050" y="414576"/>
+                </a:lnTo>
+                <a:lnTo>
+                  <a:pt x="3951316" y="399317"/>
+                </a:lnTo>
+                <a:lnTo>
+                  <a:pt x="4008581" y="384207"/>
+                </a:lnTo>
+                <a:lnTo>
+                  <a:pt x="4065847" y="369243"/>
+                </a:lnTo>
+                <a:lnTo>
+                  <a:pt x="4123112" y="354422"/>
+                </a:lnTo>
+                <a:lnTo>
+                  <a:pt x="4180378" y="339742"/>
+                </a:lnTo>
+                <a:lnTo>
+                  <a:pt x="4237643" y="325199"/>
+                </a:lnTo>
+                <a:lnTo>
+                  <a:pt x="4294909" y="310792"/>
+                </a:lnTo>
+                <a:lnTo>
+                  <a:pt x="4352174" y="296517"/>
+                </a:lnTo>
+                <a:lnTo>
+                  <a:pt x="4409440" y="282373"/>
+                </a:lnTo>
+                <a:lnTo>
+                  <a:pt x="4466705" y="268357"/>
+                </a:lnTo>
+                <a:lnTo>
+                  <a:pt x="4523970" y="254467"/>
+                </a:lnTo>
+                <a:lnTo>
+                  <a:pt x="4581236" y="240700"/>
+                </a:lnTo>
+                <a:lnTo>
+                  <a:pt x="4638501" y="227054"/>
+                </a:lnTo>
+                <a:lnTo>
+                  <a:pt x="4695767" y="213528"/>
+                </a:lnTo>
+                <a:lnTo>
+                  <a:pt x="4753032" y="200119"/>
+                </a:lnTo>
+                <a:lnTo>
+                  <a:pt x="4810298" y="186825"/>
+                </a:lnTo>
+                <a:lnTo>
+                  <a:pt x="4867563" y="173644"/>
+                </a:lnTo>
+                <a:lnTo>
+                  <a:pt x="4924829" y="160574"/>
+                </a:lnTo>
+                <a:lnTo>
+                  <a:pt x="4982094" y="147613"/>
+                </a:lnTo>
+                <a:lnTo>
+                  <a:pt x="5039360" y="134760"/>
+                </a:lnTo>
+                <a:lnTo>
+                  <a:pt x="5096625" y="122013"/>
+                </a:lnTo>
+                <a:lnTo>
+                  <a:pt x="5153890" y="109370"/>
+                </a:lnTo>
+                <a:lnTo>
+                  <a:pt x="5211156" y="96830"/>
+                </a:lnTo>
+                <a:lnTo>
+                  <a:pt x="5268421" y="84390"/>
+                </a:lnTo>
+                <a:lnTo>
+                  <a:pt x="5325687" y="72049"/>
+                </a:lnTo>
+                <a:lnTo>
+                  <a:pt x="5382952" y="59806"/>
+                </a:lnTo>
+                <a:lnTo>
+                  <a:pt x="5440218" y="47658"/>
+                </a:lnTo>
+                <a:lnTo>
+                  <a:pt x="5497483" y="35606"/>
+                </a:lnTo>
+                <a:lnTo>
+                  <a:pt x="5554749" y="23646"/>
+                </a:lnTo>
+                <a:lnTo>
+                  <a:pt x="5612014" y="11778"/>
+                </a:lnTo>
+                <a:lnTo>
+                  <a:pt x="5669280" y="0"/>
+                </a:lnTo>
+              </a:path>
+            </a:pathLst>
+          </a:custGeom>
+          <a:noFill/>
+          <a:ln w="40640">
+            <a:solidFill>
+              <a:srgbClr val="F2B880"/>
+            </a:solidFill>
+          </a:ln>
+          <a:effectLst/>
+        </p:spPr>
+        <p:txBody>
+          <a:bodyPr rtlCol="0" anchor="ctr"/>
+          <a:lstStyle/>
+          <a:p>
+            <a:pPr algn="ctr"/>
+          </a:p>
+        </p:txBody>
+      </p:sp>
+      <p:sp>
+        <p:nvSpPr>
+          <p:cNvPr id="33" name="C4-E22 polygon 31" descr="sci-ppt:o031"/>
+          <p:cNvSpPr/>
+          <p:nvPr/>
+        </p:nvSpPr>
+        <p:spPr>
+          <a:xfrm>
+            <a:off x="1200727" y="1444632"/>
+            <a:ext cx="4523971" cy="3483441"/>
+          </a:xfrm>
+          <a:custGeom>
+            <a:avLst/>
+            <a:gdLst/>
+            <a:ahLst/>
+            <a:cxnLst/>
+            <a:rect l="l" t="t" r="r" b="b"/>
+            <a:pathLst>
+              <a:path w="4523971" h="3483441">
+                <a:moveTo>
+                  <a:pt x="0" y="0"/>
+                </a:moveTo>
+                <a:lnTo>
+                  <a:pt x="57265" y="80460"/>
+                </a:lnTo>
+                <a:lnTo>
+                  <a:pt x="114531" y="158882"/>
+                </a:lnTo>
+                <a:lnTo>
+                  <a:pt x="171796" y="235368"/>
+                </a:lnTo>
+                <a:lnTo>
+                  <a:pt x="229062" y="310011"/>
+                </a:lnTo>
+                <a:lnTo>
+                  <a:pt x="286327" y="382898"/>
+                </a:lnTo>
+                <a:lnTo>
+                  <a:pt x="343593" y="454108"/>
+                </a:lnTo>
+                <a:lnTo>
+                  <a:pt x="400858" y="523719"/>
+                </a:lnTo>
+                <a:lnTo>
+                  <a:pt x="458123" y="591799"/>
+                </a:lnTo>
+                <a:lnTo>
+                  <a:pt x="515389" y="658415"/>
+                </a:lnTo>
+                <a:lnTo>
+                  <a:pt x="572654" y="723628"/>
+                </a:lnTo>
+                <a:lnTo>
+                  <a:pt x="629920" y="787497"/>
+                </a:lnTo>
+                <a:lnTo>
+                  <a:pt x="687185" y="850076"/>
+                </a:lnTo>
+                <a:lnTo>
+                  <a:pt x="744451" y="911415"/>
+                </a:lnTo>
+                <a:lnTo>
+                  <a:pt x="801716" y="971563"/>
+                </a:lnTo>
+                <a:lnTo>
+                  <a:pt x="858982" y="1030565"/>
+                </a:lnTo>
+                <a:lnTo>
+                  <a:pt x="916247" y="1088465"/>
+                </a:lnTo>
+                <a:lnTo>
+                  <a:pt x="973513" y="1145302"/>
+                </a:lnTo>
+                <a:lnTo>
+                  <a:pt x="1030778" y="1201114"/>
+                </a:lnTo>
+                <a:lnTo>
+                  <a:pt x="1088043" y="1255939"/>
+                </a:lnTo>
+                <a:lnTo>
+                  <a:pt x="1145309" y="1309811"/>
+                </a:lnTo>
+                <a:lnTo>
+                  <a:pt x="1202574" y="1362761"/>
+                </a:lnTo>
+                <a:lnTo>
+                  <a:pt x="1259840" y="1414822"/>
+                </a:lnTo>
+                <a:lnTo>
+                  <a:pt x="1317105" y="1466022"/>
+                </a:lnTo>
+                <a:lnTo>
+                  <a:pt x="1374371" y="1516389"/>
+                </a:lnTo>
+                <a:lnTo>
+                  <a:pt x="1431636" y="1565950"/>
+                </a:lnTo>
+                <a:lnTo>
+                  <a:pt x="1488902" y="1614731"/>
+                </a:lnTo>
+                <a:lnTo>
+                  <a:pt x="1546167" y="1662756"/>
+                </a:lnTo>
+                <a:lnTo>
+                  <a:pt x="1603433" y="1710048"/>
+                </a:lnTo>
+                <a:lnTo>
+                  <a:pt x="1660698" y="1756628"/>
+                </a:lnTo>
+                <a:lnTo>
+                  <a:pt x="1717963" y="1802518"/>
+                </a:lnTo>
+                <a:lnTo>
+                  <a:pt x="1775229" y="1847738"/>
+                </a:lnTo>
+                <a:lnTo>
+                  <a:pt x="1832494" y="1892308"/>
+                </a:lnTo>
+                <a:lnTo>
+                  <a:pt x="1889760" y="1936245"/>
+                </a:lnTo>
+                <a:lnTo>
+                  <a:pt x="1947025" y="1979568"/>
+                </a:lnTo>
+                <a:lnTo>
+                  <a:pt x="2004291" y="2022293"/>
+                </a:lnTo>
+                <a:lnTo>
+                  <a:pt x="2061556" y="2064437"/>
+                </a:lnTo>
+                <a:lnTo>
+                  <a:pt x="2118822" y="2106015"/>
+                </a:lnTo>
+                <a:lnTo>
+                  <a:pt x="2176087" y="2147042"/>
+                </a:lnTo>
+                <a:lnTo>
+                  <a:pt x="2233353" y="2187533"/>
+                </a:lnTo>
+                <a:lnTo>
+                  <a:pt x="2290618" y="2227502"/>
+                </a:lnTo>
+                <a:lnTo>
+                  <a:pt x="2347883" y="2266962"/>
+                </a:lnTo>
+                <a:lnTo>
+                  <a:pt x="2405149" y="2305925"/>
+                </a:lnTo>
+                <a:lnTo>
+                  <a:pt x="2462414" y="2344404"/>
+                </a:lnTo>
+                <a:lnTo>
+                  <a:pt x="2519680" y="2382411"/>
+                </a:lnTo>
+                <a:lnTo>
+                  <a:pt x="2576945" y="2419957"/>
+                </a:lnTo>
+                <a:lnTo>
+                  <a:pt x="2634211" y="2457054"/>
+                </a:lnTo>
+                <a:lnTo>
+                  <a:pt x="2691476" y="2493711"/>
+                </a:lnTo>
+                <a:lnTo>
+                  <a:pt x="2748742" y="2529940"/>
+                </a:lnTo>
+                <a:lnTo>
+                  <a:pt x="2806007" y="2565750"/>
+                </a:lnTo>
+                <a:lnTo>
+                  <a:pt x="2863273" y="2601151"/>
+                </a:lnTo>
+                <a:lnTo>
+                  <a:pt x="2920538" y="2636151"/>
+                </a:lnTo>
+                <a:lnTo>
+                  <a:pt x="2977803" y="2670761"/>
+                </a:lnTo>
+                <a:lnTo>
+                  <a:pt x="3035069" y="2704988"/>
+                </a:lnTo>
+                <a:lnTo>
+                  <a:pt x="3092334" y="2738841"/>
+                </a:lnTo>
+                <a:lnTo>
+                  <a:pt x="3149600" y="2772328"/>
+                </a:lnTo>
+                <a:lnTo>
+                  <a:pt x="3206865" y="2805457"/>
+                </a:lnTo>
+                <a:lnTo>
+                  <a:pt x="3264131" y="2838236"/>
+                </a:lnTo>
+                <a:lnTo>
+                  <a:pt x="3321396" y="2870671"/>
+                </a:lnTo>
+                <a:lnTo>
+                  <a:pt x="3378662" y="2902770"/>
+                </a:lnTo>
+                <a:lnTo>
+                  <a:pt x="3435927" y="2934539"/>
+                </a:lnTo>
+                <a:lnTo>
+                  <a:pt x="3493193" y="2965987"/>
+                </a:lnTo>
+                <a:lnTo>
+                  <a:pt x="3550458" y="2997118"/>
+                </a:lnTo>
+                <a:lnTo>
+                  <a:pt x="3607723" y="3027939"/>
+                </a:lnTo>
+                <a:lnTo>
+                  <a:pt x="3664989" y="3058457"/>
+                </a:lnTo>
+                <a:lnTo>
+                  <a:pt x="3722254" y="3088677"/>
+                </a:lnTo>
+                <a:lnTo>
+                  <a:pt x="3779520" y="3118605"/>
+                </a:lnTo>
+                <a:lnTo>
+                  <a:pt x="3836785" y="3148247"/>
+                </a:lnTo>
+                <a:lnTo>
+                  <a:pt x="3894051" y="3177607"/>
+                </a:lnTo>
+                <a:lnTo>
+                  <a:pt x="3951316" y="3206692"/>
+                </a:lnTo>
+                <a:lnTo>
+                  <a:pt x="4008582" y="3235507"/>
+                </a:lnTo>
+                <a:lnTo>
+                  <a:pt x="4065847" y="3264056"/>
+                </a:lnTo>
+                <a:lnTo>
+                  <a:pt x="4123113" y="3292344"/>
+                </a:lnTo>
+                <a:lnTo>
+                  <a:pt x="4180378" y="3320376"/>
+                </a:lnTo>
+                <a:lnTo>
+                  <a:pt x="4237643" y="3348157"/>
+                </a:lnTo>
+                <a:lnTo>
+                  <a:pt x="4294909" y="3375690"/>
+                </a:lnTo>
+                <a:lnTo>
+                  <a:pt x="4352174" y="3402982"/>
+                </a:lnTo>
+                <a:lnTo>
+                  <a:pt x="4409440" y="3430034"/>
+                </a:lnTo>
+                <a:lnTo>
+                  <a:pt x="4466705" y="3456853"/>
+                </a:lnTo>
+                <a:lnTo>
+                  <a:pt x="4523971" y="3483441"/>
+                </a:lnTo>
+              </a:path>
+            </a:pathLst>
+          </a:custGeom>
+          <a:noFill/>
+          <a:ln w="40640">
+            <a:solidFill>
+              <a:srgbClr val="F28BA0"/>
+            </a:solidFill>
+          </a:ln>
+          <a:effectLst/>
+        </p:spPr>
+        <p:txBody>
+          <a:bodyPr rtlCol="0" anchor="ctr"/>
+          <a:lstStyle/>
+          <a:p>
+            <a:pPr algn="ctr"/>
+          </a:p>
+        </p:txBody>
+      </p:sp>
+      <p:cxnSp>
+        <p:nvCxnSpPr>
+          <p:cNvPr id="34" name="C4-E22 line 32" descr="sci-ppt:o032"/>
+          <p:cNvCxnSpPr/>
+          <p:nvPr/>
+        </p:nvCxnSpPr>
+        <p:spPr>
+          <a:xfrm>
+            <a:off x="914400" y="3154680"/>
+            <a:ext cx="5669280" cy="0"/>
+          </a:xfrm>
+          <a:prstGeom prst="line">
+            <a:avLst/>
+          </a:prstGeom>
+          <a:ln w="16510">
+            <a:solidFill>
+              <a:srgbClr val="B4C7D2"/>
+            </a:solidFill>
+            <a:prstDash val="dash"/>
+          </a:ln>
+          <a:effectLst/>
+        </p:spPr>
+      </p:cxnSp>
+      <p:sp>
+        <p:nvSpPr>
+          <p:cNvPr id="35" name="C4-E22 text 33" descr="sci-ppt:o033"/>
+          <p:cNvSpPr txBox="1"/>
+          <p:nvPr/>
+        </p:nvSpPr>
+        <p:spPr>
+          <a:xfrm>
+            <a:off x="3255264" y="1726379"/>
+            <a:ext cx="3291840" cy="223900"/>
+          </a:xfrm>
+          <a:prstGeom prst="rect">
+            <a:avLst/>
+          </a:prstGeom>
+          <a:noFill/>
+          <a:effectLst/>
+        </p:spPr>
+        <p:txBody>
+          <a:bodyPr wrap="none" lIns="18288" rIns="18288" tIns="18288" bIns="18288" anchor="t">
+            <a:spAutoFit/>
+          </a:bodyPr>
+          <a:lstStyle/>
+          <a:p>
+            <a:pPr algn="l">
+              <a:spcAft>
+                <a:spcPts val="0"/>
+              </a:spcAft>
+            </a:pPr>
+            <a:r>
               <a:rPr sz="1150" b="0" i="0">
+                <a:solidFill>
+                  <a:srgbClr val="F2B880"/>
+                </a:solidFill>
+                <a:latin typeface="Arial"/>
+              </a:rPr>
+              <a:t>fixed pressure: G ∝ b⁴ (grows: unstable)</a:t>
+            </a:r>
+          </a:p>
+        </p:txBody>
+      </p:sp>
+      <p:sp>
+        <p:nvSpPr>
+          <p:cNvPr id="36" name="C4-E22 text 34" descr="sci-ppt:o034"/>
+          <p:cNvSpPr txBox="1"/>
+          <p:nvPr/>
+        </p:nvSpPr>
+        <p:spPr>
+          <a:xfrm>
+            <a:off x="1063142" y="4512387"/>
+            <a:ext cx="3108960" cy="223900"/>
+          </a:xfrm>
+          <a:prstGeom prst="rect">
+            <a:avLst/>
+          </a:prstGeom>
+          <a:noFill/>
+          <a:effectLst/>
+        </p:spPr>
+        <p:txBody>
+          <a:bodyPr wrap="none" lIns="18288" rIns="18288" tIns="18288" bIns="18288" anchor="t">
+            <a:spAutoFit/>
+          </a:bodyPr>
+          <a:lstStyle/>
+          <a:p>
+            <a:pPr algn="l">
+              <a:spcAft>
+                <a:spcPts val="0"/>
+              </a:spcAft>
+            </a:pPr>
+            <a:r>
+              <a:rPr sz="1150" b="0" i="0">
+                <a:solidFill>
+                  <a:srgbClr val="F28BA0"/>
+                </a:solidFill>
+                <a:latin typeface="Arial"/>
+              </a:rPr>
+              <a:t>fixed volume: G ∝ b⁻⁸ (falls: stable)</a:t>
+            </a:r>
+          </a:p>
+        </p:txBody>
+      </p:sp>
+      <p:sp>
+        <p:nvSpPr>
+          <p:cNvPr id="37" name="C4-E22 round_rect 35" descr="sci-ppt:o035"/>
+          <p:cNvSpPr/>
+          <p:nvPr/>
+        </p:nvSpPr>
+        <p:spPr>
+          <a:xfrm>
+            <a:off x="6858000" y="1371600"/>
+            <a:ext cx="4983480" cy="3566160"/>
+          </a:xfrm>
+          <a:prstGeom prst="roundRect">
+            <a:avLst/>
+          </a:prstGeom>
+          <a:solidFill>
+            <a:srgbClr val="213E4B"/>
+          </a:solidFill>
+          <a:ln w="20320">
+            <a:solidFill>
+              <a:srgbClr val="8EDBD4"/>
+            </a:solidFill>
+          </a:ln>
+          <a:effectLst/>
+        </p:spPr>
+        <p:txBody>
+          <a:bodyPr rtlCol="0" anchor="ctr"/>
+          <a:lstStyle/>
+          <a:p>
+            <a:pPr algn="ctr"/>
+          </a:p>
+        </p:txBody>
+      </p:sp>
+      <p:sp>
+        <p:nvSpPr>
+          <p:cNvPr id="38" name="C4-E22 text 36" descr="sci-ppt:o036"/>
+          <p:cNvSpPr txBox="1"/>
+          <p:nvPr/>
+        </p:nvSpPr>
+        <p:spPr>
+          <a:xfrm>
+            <a:off x="6967728" y="1426464"/>
+            <a:ext cx="4764024" cy="254889"/>
+          </a:xfrm>
+          <a:prstGeom prst="rect">
+            <a:avLst/>
+          </a:prstGeom>
+          <a:noFill/>
+          <a:effectLst/>
+        </p:spPr>
+        <p:txBody>
+          <a:bodyPr wrap="none" lIns="18288" rIns="18288" tIns="18288" bIns="18288" anchor="t">
+            <a:spAutoFit/>
+          </a:bodyPr>
+          <a:lstStyle/>
+          <a:p>
+            <a:pPr algn="l">
+              <a:spcAft>
+                <a:spcPts val="0"/>
+              </a:spcAft>
+            </a:pPr>
+            <a:r>
+              <a:rPr sz="1350" b="1" i="0">
+                <a:solidFill>
+                  <a:srgbClr val="8EDBD4"/>
+                </a:solidFill>
+                <a:latin typeface="Arial"/>
+              </a:rPr>
+              <a:t>Same plate, two load controls</a:t>
+            </a:r>
+          </a:p>
+        </p:txBody>
+      </p:sp>
+      <p:sp>
+        <p:nvSpPr>
+          <p:cNvPr id="39" name="C4-E22 text 37" descr="sci-ppt:o037"/>
+          <p:cNvSpPr txBox="1"/>
+          <p:nvPr/>
+        </p:nvSpPr>
+        <p:spPr>
+          <a:xfrm>
+            <a:off x="6995160" y="1783080"/>
+            <a:ext cx="4754880" cy="223900"/>
+          </a:xfrm>
+          <a:prstGeom prst="rect">
+            <a:avLst/>
+          </a:prstGeom>
+          <a:noFill/>
+          <a:effectLst/>
+        </p:spPr>
+        <p:txBody>
+          <a:bodyPr wrap="none" lIns="18288" rIns="18288" tIns="18288" bIns="18288" anchor="t">
+            <a:spAutoFit/>
+          </a:bodyPr>
+          <a:lstStyle/>
+          <a:p>
+            <a:pPr algn="l">
+              <a:spcAft>
+                <a:spcPts val="0"/>
+              </a:spcAft>
+            </a:pPr>
+            <a:r>
+              <a:rPr sz="1150" b="1" i="0">
+                <a:solidFill>
+                  <a:srgbClr val="E7F0F3"/>
+                </a:solidFill>
+                <a:latin typeface="Arial"/>
+              </a:rPr>
+              <a:t>U_b|V̄ = V̄² / (2C_b) = 96 D_f V̄² / (π b⁶)</a:t>
+            </a:r>
+          </a:p>
+        </p:txBody>
+      </p:sp>
+      <p:sp>
+        <p:nvSpPr>
+          <p:cNvPr id="40" name="C4-E22 text 38" descr="sci-ppt:o038"/>
+          <p:cNvSpPr txBox="1"/>
+          <p:nvPr/>
+        </p:nvSpPr>
+        <p:spPr>
+          <a:xfrm>
+            <a:off x="6995160" y="2286000"/>
+            <a:ext cx="4754880" cy="239395"/>
+          </a:xfrm>
+          <a:prstGeom prst="rect">
+            <a:avLst/>
+          </a:prstGeom>
+          <a:noFill/>
+          <a:effectLst/>
+        </p:spPr>
+        <p:txBody>
+          <a:bodyPr wrap="none" lIns="18288" rIns="18288" tIns="18288" bIns="18288" anchor="t">
+            <a:spAutoFit/>
+          </a:bodyPr>
+          <a:lstStyle/>
+          <a:p>
+            <a:pPr algn="l">
+              <a:spcAft>
+                <a:spcPts val="0"/>
+              </a:spcAft>
+            </a:pPr>
+            <a:r>
+              <a:rPr sz="1250" b="1" i="0">
+                <a:solidFill>
+                  <a:srgbClr val="E7F0F3"/>
+                </a:solidFill>
+                <a:latin typeface="Arial"/>
+              </a:rPr>
+              <a:t>p(b) = 192 D_f V̄ / (π b⁶)</a:t>
+            </a:r>
+          </a:p>
+        </p:txBody>
+      </p:sp>
+      <p:sp>
+        <p:nvSpPr>
+          <p:cNvPr id="41" name="C4-E22 text 39" descr="sci-ppt:o039"/>
+          <p:cNvSpPr txBox="1"/>
+          <p:nvPr/>
+        </p:nvSpPr>
+        <p:spPr>
+          <a:xfrm>
+            <a:off x="6995160" y="2788920"/>
+            <a:ext cx="4754880" cy="223900"/>
+          </a:xfrm>
+          <a:prstGeom prst="rect">
+            <a:avLst/>
+          </a:prstGeom>
+          <a:noFill/>
+          <a:effectLst/>
+        </p:spPr>
+        <p:txBody>
+          <a:bodyPr wrap="none" lIns="18288" rIns="18288" tIns="18288" bIns="18288" anchor="t">
+            <a:spAutoFit/>
+          </a:bodyPr>
+          <a:lstStyle/>
+          <a:p>
+            <a:pPr algn="l">
+              <a:spcAft>
+                <a:spcPts val="0"/>
+              </a:spcAft>
+            </a:pPr>
+            <a:r>
+              <a:rPr sz="1150" b="1" i="0">
+                <a:solidFill>
+                  <a:srgbClr val="F2B880"/>
+                </a:solidFill>
+                <a:latin typeface="Arial"/>
+              </a:rPr>
+              <a:t>G_V̄ = 288 D_f V̄² / (π² b⁸) = p(b)² b⁴ / (128 D_f)</a:t>
+            </a:r>
+          </a:p>
+        </p:txBody>
+      </p:sp>
+      <p:sp>
+        <p:nvSpPr>
+          <p:cNvPr id="42" name="C4-E22 text 40" descr="sci-ppt:o040"/>
+          <p:cNvSpPr txBox="1"/>
+          <p:nvPr/>
+        </p:nvSpPr>
+        <p:spPr>
+          <a:xfrm>
+            <a:off x="6995160" y="3474720"/>
+            <a:ext cx="4754880" cy="417576"/>
+          </a:xfrm>
+          <a:prstGeom prst="rect">
+            <a:avLst/>
+          </a:prstGeom>
+          <a:noFill/>
+          <a:effectLst/>
+        </p:spPr>
+        <p:txBody>
+          <a:bodyPr wrap="none" lIns="18288" rIns="18288" tIns="18288" bIns="18288" anchor="t">
+            <a:spAutoFit/>
+          </a:bodyPr>
+          <a:lstStyle/>
+          <a:p>
+            <a:pPr algn="l">
+              <a:spcAft>
+                <a:spcPts val="0"/>
+              </a:spcAft>
+            </a:pPr>
+            <a:r>
+              <a:rPr sz="1200" b="0" i="0">
                 <a:solidFill>
                   <a:srgbClr val="B4C7D2"/>
                 </a:solidFill>
                 <a:latin typeface="Arial"/>
               </a:rPr>
-              <a:t>• V̄ — fixed added volume</a:t>
-            </a:r>
-          </a:p>
-        </p:txBody>
-      </p:sp>
-      <p:sp>
-        <p:nvSpPr>
-          <p:cNvPr id="14" name="C4-E22 text 12" descr="sci-ppt:o012"/>
+              <a:t>Same formula in p, but p itself falls as b⁻⁶ at fixed</a:t>
+            </a:r>
+          </a:p>
+          <a:p>
+            <a:pPr algn="l">
+              <a:spcAft>
+                <a:spcPts val="0"/>
+              </a:spcAft>
+            </a:pPr>
+            <a:r>
+              <a:rPr sz="1200" b="0" i="0">
+                <a:solidFill>
+                  <a:srgbClr val="B4C7D2"/>
+                </a:solidFill>
+                <a:latin typeface="Arial"/>
+              </a:rPr>
+              <a:t>volume.</a:t>
+            </a:r>
+          </a:p>
+        </p:txBody>
+      </p:sp>
+      <p:sp>
+        <p:nvSpPr>
+          <p:cNvPr id="43" name="C4-E22 text 41" descr="sci-ppt:o041"/>
           <p:cNvSpPr txBox="1"/>
           <p:nvPr/>
         </p:nvSpPr>
         <p:spPr>
           <a:xfrm>
-            <a:off x="6217920" y="4096512"/>
-            <a:ext cx="5715000" cy="246888"/>
+            <a:off x="914400" y="5486400"/>
+            <a:ext cx="10972800" cy="239395"/>
           </a:xfrm>
           <a:prstGeom prst="rect">
             <a:avLst/>
@@ -3520,7 +4939,7 @@
           <a:effectLst/>
         </p:spPr>
         <p:txBody>
-          <a:bodyPr wrap="square" lIns="27432" rIns="27432" tIns="18288" bIns="18288" anchor="ctr">
+          <a:bodyPr wrap="none" lIns="18288" rIns="18288" tIns="18288" bIns="18288" anchor="t">
             <a:spAutoFit/>
           </a:bodyPr>
           <a:lstStyle/>
@@ -3531,27 +4950,27 @@
               </a:spcAft>
             </a:pPr>
             <a:r>
-              <a:rPr sz="1150" b="0" i="0">
+              <a:rPr sz="1250" b="0" i="0">
                 <a:solidFill>
-                  <a:srgbClr val="B4C7D2"/>
+                  <a:srgbClr val="E7F0F3"/>
                 </a:solidFill>
                 <a:latin typeface="Arial"/>
               </a:rPr>
-              <a:t>• b ↑ advancing crack</a:t>
-            </a:r>
-          </a:p>
-        </p:txBody>
-      </p:sp>
-      <p:sp>
-        <p:nvSpPr>
-          <p:cNvPr id="15" name="C4-E22 text 13" descr="sci-ppt:o013"/>
+              <a:t>A maintained pressure source lets the crack run away; a fixed liquid volume arrests it. Always state the control.</a:t>
+            </a:r>
+          </a:p>
+        </p:txBody>
+      </p:sp>
+      <p:sp>
+        <p:nvSpPr>
+          <p:cNvPr id="44" name="C4-E22 text 42" descr="sci-ppt:o042"/>
           <p:cNvSpPr txBox="1"/>
           <p:nvPr/>
         </p:nvSpPr>
         <p:spPr>
           <a:xfrm>
-            <a:off x="320040" y="4329684"/>
-            <a:ext cx="5715000" cy="246888"/>
+            <a:off x="320040" y="6510528"/>
+            <a:ext cx="11521440" cy="200660"/>
           </a:xfrm>
           <a:prstGeom prst="rect">
             <a:avLst/>
@@ -3560,247 +4979,7 @@
           <a:effectLst/>
         </p:spPr>
         <p:txBody>
-          <a:bodyPr wrap="square" lIns="27432" rIns="27432" tIns="18288" bIns="18288" anchor="ctr">
-            <a:spAutoFit/>
-          </a:bodyPr>
-          <a:lstStyle/>
-          <a:p>
-            <a:pPr algn="l">
-              <a:spcAft>
-                <a:spcPts val="0"/>
-              </a:spcAft>
-            </a:pPr>
-            <a:r>
-              <a:rPr sz="1150" b="0" i="0">
-                <a:solidFill>
-                  <a:srgbClr val="B4C7D2"/>
-                </a:solidFill>
-                <a:latin typeface="Arial"/>
-              </a:rPr>
-              <a:t>• p(b) ↓ as compliance grows</a:t>
-            </a:r>
-          </a:p>
-        </p:txBody>
-      </p:sp>
-      <p:sp>
-        <p:nvSpPr>
-          <p:cNvPr id="16" name="C4-E22 text 14" descr="sci-ppt:o014"/>
-          <p:cNvSpPr txBox="1"/>
-          <p:nvPr/>
-        </p:nvSpPr>
-        <p:spPr>
-          <a:xfrm>
-            <a:off x="6217920" y="4329684"/>
-            <a:ext cx="5715000" cy="246888"/>
-          </a:xfrm>
-          <a:prstGeom prst="rect">
-            <a:avLst/>
-          </a:prstGeom>
-          <a:noFill/>
-          <a:effectLst/>
-        </p:spPr>
-        <p:txBody>
-          <a:bodyPr wrap="square" lIns="27432" rIns="27432" tIns="18288" bIns="18288" anchor="ctr">
-            <a:spAutoFit/>
-          </a:bodyPr>
-          <a:lstStyle/>
-          <a:p>
-            <a:pPr algn="l">
-              <a:spcAft>
-                <a:spcPts val="0"/>
-              </a:spcAft>
-            </a:pPr>
-            <a:r>
-              <a:rPr sz="1150" b="0" i="0">
-                <a:solidFill>
-                  <a:srgbClr val="B4C7D2"/>
-                </a:solidFill>
-                <a:latin typeface="Arial"/>
-              </a:rPr>
-              <a:t>• C_b, D_f — elastic compliance</a:t>
-            </a:r>
-          </a:p>
-        </p:txBody>
-      </p:sp>
-      <p:sp>
-        <p:nvSpPr>
-          <p:cNvPr id="17" name="C4-E22 text 15" descr="sci-ppt:o015"/>
-          <p:cNvSpPr txBox="1"/>
-          <p:nvPr/>
-        </p:nvSpPr>
-        <p:spPr>
-          <a:xfrm>
-            <a:off x="320040" y="4562856"/>
-            <a:ext cx="5715000" cy="246888"/>
-          </a:xfrm>
-          <a:prstGeom prst="rect">
-            <a:avLst/>
-          </a:prstGeom>
-          <a:noFill/>
-          <a:effectLst/>
-        </p:spPr>
-        <p:txBody>
-          <a:bodyPr wrap="square" lIns="27432" rIns="27432" tIns="18288" bIns="18288" anchor="ctr">
-            <a:spAutoFit/>
-          </a:bodyPr>
-          <a:lstStyle/>
-          <a:p>
-            <a:pPr algn="l">
-              <a:spcAft>
-                <a:spcPts val="0"/>
-              </a:spcAft>
-            </a:pPr>
-            <a:r>
-              <a:rPr sz="1150" b="0" i="0">
-                <a:solidFill>
-                  <a:srgbClr val="B4C7D2"/>
-                </a:solidFill>
-                <a:latin typeface="Arial"/>
-              </a:rPr>
-              <a:t>• U_b — plate storage</a:t>
-            </a:r>
-          </a:p>
-        </p:txBody>
-      </p:sp>
-      <p:sp>
-        <p:nvSpPr>
-          <p:cNvPr id="18" name="C4-E22 text 16" descr="sci-ppt:o016"/>
-          <p:cNvSpPr txBox="1"/>
-          <p:nvPr/>
-        </p:nvSpPr>
-        <p:spPr>
-          <a:xfrm>
-            <a:off x="6217920" y="4562856"/>
-            <a:ext cx="5715000" cy="246888"/>
-          </a:xfrm>
-          <a:prstGeom prst="rect">
-            <a:avLst/>
-          </a:prstGeom>
-          <a:noFill/>
-          <a:effectLst/>
-        </p:spPr>
-        <p:txBody>
-          <a:bodyPr wrap="square" lIns="27432" rIns="27432" tIns="18288" bIns="18288" anchor="ctr">
-            <a:spAutoFit/>
-          </a:bodyPr>
-          <a:lstStyle/>
-          <a:p>
-            <a:pPr algn="l">
-              <a:spcAft>
-                <a:spcPts val="0"/>
-              </a:spcAft>
-            </a:pPr>
-            <a:r>
-              <a:rPr sz="1150" b="0" i="0">
-                <a:solidFill>
-                  <a:srgbClr val="B4C7D2"/>
-                </a:solidFill>
-                <a:latin typeface="Arial"/>
-              </a:rPr>
-              <a:t>• G_V̄ ∝ b⁻⁸</a:t>
-            </a:r>
-          </a:p>
-        </p:txBody>
-      </p:sp>
-      <p:sp>
-        <p:nvSpPr>
-          <p:cNvPr id="19" name="C4-E22 text 17" descr="sci-ppt:o017"/>
-          <p:cNvSpPr txBox="1"/>
-          <p:nvPr/>
-        </p:nvSpPr>
-        <p:spPr>
-          <a:xfrm>
-            <a:off x="320040" y="4796028"/>
-            <a:ext cx="5715000" cy="246888"/>
-          </a:xfrm>
-          <a:prstGeom prst="rect">
-            <a:avLst/>
-          </a:prstGeom>
-          <a:noFill/>
-          <a:effectLst/>
-        </p:spPr>
-        <p:txBody>
-          <a:bodyPr wrap="square" lIns="27432" rIns="27432" tIns="18288" bIns="18288" anchor="ctr">
-            <a:spAutoFit/>
-          </a:bodyPr>
-          <a:lstStyle/>
-          <a:p>
-            <a:pPr algn="l">
-              <a:spcAft>
-                <a:spcPts val="0"/>
-              </a:spcAft>
-            </a:pPr>
-            <a:r>
-              <a:rPr sz="1150" b="0" i="0">
-                <a:solidFill>
-                  <a:srgbClr val="B4C7D2"/>
-                </a:solidFill>
-                <a:latin typeface="Arial"/>
-              </a:rPr>
-              <a:t>• G_p₀ ∝ b⁴ under fixed p₀</a:t>
-            </a:r>
-          </a:p>
-        </p:txBody>
-      </p:sp>
-      <p:sp>
-        <p:nvSpPr>
-          <p:cNvPr id="20" name="C4-E22 text 18" descr="sci-ppt:o018"/>
-          <p:cNvSpPr txBox="1"/>
-          <p:nvPr/>
-        </p:nvSpPr>
-        <p:spPr>
-          <a:xfrm>
-            <a:off x="320040" y="5596128"/>
-            <a:ext cx="11430000" cy="292608"/>
-          </a:xfrm>
-          <a:prstGeom prst="rect">
-            <a:avLst/>
-          </a:prstGeom>
-          <a:noFill/>
-          <a:effectLst/>
-        </p:spPr>
-        <p:txBody>
-          <a:bodyPr wrap="square" lIns="27432" rIns="27432" tIns="18288" bIns="18288" anchor="ctr">
-            <a:spAutoFit/>
-          </a:bodyPr>
-          <a:lstStyle/>
-          <a:p>
-            <a:pPr algn="l">
-              <a:spcAft>
-                <a:spcPts val="0"/>
-              </a:spcAft>
-            </a:pPr>
-            <a:r>
-              <a:rPr sz="1150" b="0" i="0">
-                <a:solidFill>
-                  <a:srgbClr val="8EDBD4"/>
-                </a:solidFill>
-                <a:latin typeface="Arial"/>
-              </a:rPr>
-              <a:t>Same instantaneous state does not imply the same crack trajectory.</a:t>
-            </a:r>
-          </a:p>
-        </p:txBody>
-      </p:sp>
-      <p:sp>
-        <p:nvSpPr>
-          <p:cNvPr id="21" name="C4-E22 text 19" descr="sci-ppt:o019"/>
-          <p:cNvSpPr txBox="1"/>
-          <p:nvPr/>
-        </p:nvSpPr>
-        <p:spPr>
-          <a:xfrm>
-            <a:off x="320040" y="6473952"/>
-            <a:ext cx="11430000" cy="256032"/>
-          </a:xfrm>
-          <a:prstGeom prst="rect">
-            <a:avLst/>
-          </a:prstGeom>
-          <a:noFill/>
-          <a:effectLst/>
-        </p:spPr>
-        <p:txBody>
-          <a:bodyPr wrap="square" lIns="27432" rIns="27432" tIns="18288" bIns="18288" anchor="ctr">
+          <a:bodyPr wrap="none" lIns="18288" rIns="18288" tIns="18288" bIns="18288" anchor="t">
             <a:spAutoFit/>
           </a:bodyPr>
           <a:lstStyle/>
@@ -3817,7 +4996,7 @@
                 </a:solidFill>
                 <a:latin typeface="Arial"/>
               </a:rPr>
-              <a:t>Model schematic; geometry is not to scale.</a:t>
+              <a:t>Loading-control comparison of Eq. C4-E22.</a:t>
             </a:r>
           </a:p>
         </p:txBody>
